--- a/reports/revenue/Revenue_CM_Management_Review.pptx
+++ b/reports/revenue/Revenue_CM_Management_Review.pptx
@@ -116,32 +116,32 @@
   <p:extLst>
     <p:ext uri="{521415D9-36F7-43E2-AB2F-B90AF26B5E84}">
       <p14:sectionLst xmlns:p14="http://schemas.microsoft.com/office/powerpoint/2010/main">
-        <p14:section name="Summary" id="{d36f70ba-9512-c2e2-a7aa-fb2a9ef89291}">
+        <p14:section name="Summary" id="{3ceb0faf-5d41-af8f-1404-6d2eabf9e97a}">
           <p14:sldIdLst>
             <p14:sldId id="256"/>
             <p14:sldId id="257"/>
           </p14:sldIdLst>
         </p14:section>
-        <p14:section name="Trend" id="{75ddecd2-a411-7f94-7bb4-27e52f14f5e7}">
+        <p14:section name="Trend" id="{d8c4ecd9-50bc-5778-1d23-53b15db4f298}">
           <p14:sldIdLst>
             <p14:sldId id="258"/>
             <p14:sldId id="259"/>
             <p14:sldId id="260"/>
           </p14:sldIdLst>
         </p14:section>
-        <p14:section name="Buyers" id="{467c19d0-b3b9-447e-722b-8b80b77fab4a}">
+        <p14:section name="Buyers" id="{9ecea25f-bf3d-b567-ba4b-583067698308}">
           <p14:sldIdLst>
             <p14:sldId id="261"/>
             <p14:sldId id="262"/>
             <p14:sldId id="263"/>
           </p14:sldIdLst>
         </p14:section>
-        <p14:section name="Lines" id="{526f095e-cacd-428d-e967-86f3d6230d33}">
+        <p14:section name="Lines" id="{135ffa86-ee74-e9a5-3162-0b2d584a4adc}">
           <p14:sldIdLst>
             <p14:sldId id="264"/>
           </p14:sldIdLst>
         </p14:section>
-        <p14:section name="Discussion" id="{8cd9f23e-3dfd-b59d-37fe-83387696c43a}">
+        <p14:section name="Discussion" id="{b7f6b86c-399e-36df-9536-f25ea4b956c6}">
           <p14:sldIdLst>
             <p14:sldId id="265"/>
           </p14:sldIdLst>
@@ -286,7 +286,7 @@
                   <c:v>2190431</c:v>
                 </c:pt>
                 <c:pt idx="9">
-                  <c:v>1268834</c:v>
+                  <c:v>1868748</c:v>
                 </c:pt>
               </c:numCache>
             </c:numRef>
@@ -590,7 +590,7 @@
                   <c:v>2217</c:v>
                 </c:pt>
                 <c:pt idx="9">
-                  <c:v>2385</c:v>
+                  <c:v>2512</c:v>
                 </c:pt>
               </c:numCache>
             </c:numRef>
@@ -1191,7 +1191,7 @@
                   <c:v>-1267569</c:v>
                 </c:pt>
                 <c:pt idx="9">
-                  <c:v>-593166</c:v>
+                  <c:v>-735252</c:v>
                 </c:pt>
               </c:numCache>
             </c:numRef>
@@ -1570,37 +1570,37 @@
                 <c:formatCode>General</c:formatCode>
                 <c:ptCount val="11"/>
                 <c:pt idx="0">
-                  <c:v>1897661</c:v>
+                  <c:v>2012180</c:v>
                 </c:pt>
                 <c:pt idx="1">
                   <c:v>431527</c:v>
                 </c:pt>
                 <c:pt idx="2">
-                  <c:v>611579</c:v>
+                  <c:v>621865</c:v>
                 </c:pt>
                 <c:pt idx="3">
-                  <c:v>646838</c:v>
+                  <c:v>657053</c:v>
                 </c:pt>
                 <c:pt idx="4">
-                  <c:v>656632</c:v>
+                  <c:v>677871</c:v>
                 </c:pt>
                 <c:pt idx="5">
-                  <c:v>779521</c:v>
+                  <c:v>812356</c:v>
                 </c:pt>
                 <c:pt idx="6">
-                  <c:v>807716</c:v>
+                  <c:v>826218</c:v>
                 </c:pt>
                 <c:pt idx="7">
-                  <c:v>1313095</c:v>
+                  <c:v>1323568</c:v>
                 </c:pt>
                 <c:pt idx="8">
-                  <c:v>2300232</c:v>
+                  <c:v>2402256</c:v>
                 </c:pt>
                 <c:pt idx="9">
-                  <c:v>6082387</c:v>
+                  <c:v>6274254</c:v>
                 </c:pt>
                 <c:pt idx="10">
-                  <c:v>7120480</c:v>
+                  <c:v>7208435</c:v>
                 </c:pt>
               </c:numCache>
             </c:numRef>
@@ -1850,10 +1850,10 @@
                     <c:v>Line 1 · U1</c:v>
                   </c:pt>
                   <c:pt idx="2">
-                    <c:v>Line 22 · U2</c:v>
+                    <c:v>Line 15 · U1</c:v>
                   </c:pt>
                   <c:pt idx="3">
-                    <c:v>Line 15 · U1</c:v>
+                    <c:v>Line 22 · U2</c:v>
                   </c:pt>
                   <c:pt idx="4">
                     <c:v>Line 7 · U1</c:v>
@@ -1872,22 +1872,22 @@
                 <c:formatCode>General</c:formatCode>
                 <c:ptCount val="6"/>
                 <c:pt idx="0">
-                  <c:v>2905</c:v>
+                  <c:v>2893</c:v>
                 </c:pt>
                 <c:pt idx="1">
-                  <c:v>2907</c:v>
+                  <c:v>2930</c:v>
                 </c:pt>
                 <c:pt idx="2">
-                  <c:v>2958</c:v>
+                  <c:v>2979</c:v>
                 </c:pt>
                 <c:pt idx="3">
-                  <c:v>2959</c:v>
+                  <c:v>2985</c:v>
                 </c:pt>
                 <c:pt idx="4">
-                  <c:v>2994</c:v>
+                  <c:v>3005</c:v>
                 </c:pt>
                 <c:pt idx="5">
-                  <c:v>3111</c:v>
+                  <c:v>3110</c:v>
                 </c:pt>
               </c:numCache>
             </c:numRef>
@@ -2133,10 +2133,10 @@
                 <c:ptCount val="6"/>
                 <c:lvl>
                   <c:pt idx="0">
-                    <c:v>Line 31 · U2</c:v>
+                    <c:v>Line 9 · U1</c:v>
                   </c:pt>
                   <c:pt idx="1">
-                    <c:v>Line 9 · U1</c:v>
+                    <c:v>Line 31 · U2</c:v>
                   </c:pt>
                   <c:pt idx="2">
                     <c:v>Line 27 · U2</c:v>
@@ -2164,19 +2164,19 @@
                   <c:v>2246</c:v>
                 </c:pt>
                 <c:pt idx="1">
-                  <c:v>2240</c:v>
+                  <c:v>2242</c:v>
                 </c:pt>
                 <c:pt idx="2">
-                  <c:v>2195</c:v>
+                  <c:v>2201</c:v>
                 </c:pt>
                 <c:pt idx="3">
-                  <c:v>2157</c:v>
+                  <c:v>2152</c:v>
                 </c:pt>
                 <c:pt idx="4">
-                  <c:v>2132</c:v>
+                  <c:v>2123</c:v>
                 </c:pt>
                 <c:pt idx="5">
-                  <c:v>1725</c:v>
+                  <c:v>1728</c:v>
                 </c:pt>
               </c:numCache>
             </c:numRef>
@@ -3753,7 +3753,7 @@
                   <a:srgbClr val="8A96AB"/>
                 </a:solidFill>
               </a:rPr>
-              <a:t>Revenue &amp; CM Earned · 01 Jan 2026 – 17 Oct 2026 · Buyer wise average CM &amp;earned report-2026  on 18-Oct-26.xlsx</a:t>
+              <a:t>Revenue &amp; CM Earned · 01 Jan 2026 – 24 Oct 2026 · Buyer wise average CM &amp;earned report-2026 on 25-Oct-25.xlsx</a:t>
             </a:r>
             <a:endParaRPr lang="en-US" sz="900" dirty="0"/>
           </a:p>
@@ -4219,7 +4219,7 @@
                   <a:srgbClr val="C9D6F2"/>
                 </a:solidFill>
               </a:rPr>
-              <a:t>Management review · 01 Jan 2026 – 17 Oct 2026</a:t>
+              <a:t>Management review · 01 Jan 2026 – 24 Oct 2026</a:t>
             </a:r>
             <a:endParaRPr lang="en-US" sz="2200" dirty="0"/>
           </a:p>
@@ -4255,7 +4255,7 @@
                   <a:srgbClr val="FFFFFF"/>
                 </a:solidFill>
               </a:rPr>
-              <a:t>$22.65M</a:t>
+              <a:t>$23.25M</a:t>
             </a:r>
             <a:pPr indent="0" marL="0">
               <a:buNone/>
@@ -4266,7 +4266,7 @@
                   <a:srgbClr val="C9D6F2"/>
                 </a:solidFill>
               </a:rPr>
-              <a:t>   CM earned from sewing · 8,854 line-days · 38 lines · 25 buyers</a:t>
+              <a:t>   CM earned from sewing · 9,066 line-days · 38 lines · 25 buyers</a:t>
             </a:r>
             <a:endParaRPr lang="en-US" sz="4000" dirty="0"/>
           </a:p>
@@ -4302,7 +4302,7 @@
                   <a:srgbClr val="9DB0D8"/>
                 </a:solidFill>
               </a:rPr>
-              <a:t>Source: Revenue / Buyer wise average CM &amp;earned report-2026  on 18-Oct-26.xlsx · 01 Jan 2026 – 17 Oct 2026</a:t>
+              <a:t>Source: Revenue / Buyer wise average CM &amp;earned report-2026 on 25-Oct-25.xlsx · 01 Jan 2026 – 24 Oct 2026</a:t>
             </a:r>
             <a:endParaRPr lang="en-US" sz="1100" dirty="0"/>
           </a:p>
@@ -4510,7 +4510,7 @@
                   <a:srgbClr val="14213D"/>
                 </a:solidFill>
               </a:rPr>
-              <a:t>Factory 69.3% vs 80% standard. Each point ≈ $326,806 CM. Fell from 76.6% in Jan to 64.2% in Oct.</a:t>
+              <a:t>Factory 69.2% vs 80% standard. Each point ≈ $335,948 CM. Fell from 76.6% in Jan to 64.4% in Oct.</a:t>
             </a:r>
             <a:endParaRPr lang="en-US" sz="1500" dirty="0"/>
           </a:p>
@@ -4621,7 +4621,7 @@
                   <a:srgbClr val="14213D"/>
                 </a:solidFill>
               </a:rPr>
-              <a:t>Below $2,000 per line-day with ≥ 100 line-days: MED COUTURE $1,769, CARREFOUR $1,780. Review price / CM per minute or line allocation.</a:t>
+              <a:t>Below $2,000 per line-day with ≥ 100 line-days: MED COUTURE $1,769, CARREFOUR $1,777. Review price / CM per minute or line allocation.</a:t>
             </a:r>
             <a:endParaRPr lang="en-US" sz="1500" dirty="0"/>
           </a:p>
@@ -4732,7 +4732,7 @@
                   <a:srgbClr val="14213D"/>
                 </a:solidFill>
               </a:rPr>
-              <a:t>TARGET $2,203 and KMART $2,215 per line-day — both under $2,500; efficiency 66.8% / 68.8%.</a:t>
+              <a:t>TARGET $2,199 and KMART $2,212 per line-day — both under $2,500; efficiency 66.6% / 68.5%.</a:t>
             </a:r>
             <a:endParaRPr lang="en-US" sz="1500" dirty="0"/>
           </a:p>
@@ -4843,7 +4843,7 @@
                   <a:srgbClr val="14213D"/>
                 </a:solidFill>
               </a:rPr>
-              <a:t>Lowest: Line 23 (U2) $1,725, Line 28 (U2) $2,132, Line 10 (U1) $2,157.</a:t>
+              <a:t>Lowest: Line 23 (U2) $1,728, Line 28 (U2) $2,123, Line 10 (U1) $2,152.</a:t>
             </a:r>
             <a:endParaRPr lang="en-US" sz="1500" dirty="0"/>
           </a:p>
@@ -4954,7 +4954,7 @@
                   <a:srgbClr val="14213D"/>
                 </a:solidFill>
               </a:rPr>
-              <a:t>Factory average $2,558 is $942 below the $3,500 line target; confirm whether $3,500 stays the target for Q4.</a:t>
+              <a:t>Factory average $2,564 is $936 below the $3,500 line target; confirm whether $3,500 stays the target for Q4.</a:t>
             </a:r>
             <a:endParaRPr lang="en-US" sz="1500" dirty="0"/>
           </a:p>
@@ -5096,7 +5096,7 @@
                   <a:srgbClr val="52607A"/>
                 </a:solidFill>
               </a:rPr>
-              <a:t>Factory: $2,558 per line-day vs $2,500 benchmark (+$58) and $3,500 target (−$942)</a:t>
+              <a:t>Factory: $2,564 per line-day vs $2,500 benchmark (+$64) and $3,500 target (−$936)</a:t>
             </a:r>
             <a:endParaRPr lang="en-US" sz="1300" dirty="0"/>
           </a:p>
@@ -5195,7 +5195,7 @@
                   <a:srgbClr val="FFFFFF"/>
                 </a:solidFill>
               </a:rPr>
-              <a:t>$22.65M</a:t>
+              <a:t>$23.25M</a:t>
             </a:r>
             <a:endParaRPr lang="en-US" sz="3400" dirty="0"/>
           </a:p>
@@ -5231,7 +5231,7 @@
                   <a:srgbClr val="C9D6F2"/>
                 </a:solidFill>
               </a:rPr>
-              <a:t>8,854 line-days · 10 months</a:t>
+              <a:t>9,066 line-days · 10 months</a:t>
             </a:r>
             <a:endParaRPr lang="en-US" sz="1050" dirty="0"/>
           </a:p>
@@ -5330,7 +5330,7 @@
                   <a:srgbClr val="1A7F4B"/>
                 </a:solidFill>
               </a:rPr>
-              <a:t>$2,558</a:t>
+              <a:t>$2,564</a:t>
             </a:r>
             <a:endParaRPr lang="en-US" sz="2800" dirty="0"/>
           </a:p>
@@ -5465,7 +5465,7 @@
                   <a:srgbClr val="C23B3B"/>
                 </a:solidFill>
               </a:rPr>
-              <a:t>−$8.34M</a:t>
+              <a:t>−$8.48M</a:t>
             </a:r>
             <a:endParaRPr lang="en-US" sz="2800" dirty="0"/>
           </a:p>
@@ -5501,7 +5501,7 @@
                   <a:srgbClr val="52607A"/>
                 </a:solidFill>
               </a:rPr>
-              <a:t>short $942 per line-day</a:t>
+              <a:t>short $936 per line-day</a:t>
             </a:r>
             <a:endParaRPr lang="en-US" sz="1050" dirty="0"/>
           </a:p>
@@ -5600,7 +5600,7 @@
                   <a:srgbClr val="C23B3B"/>
                 </a:solidFill>
               </a:rPr>
-              <a:t>69.3%</a:t>
+              <a:t>69.2%</a:t>
             </a:r>
             <a:endParaRPr lang="en-US" sz="2800" dirty="0"/>
           </a:p>
@@ -5735,7 +5735,7 @@
                   <a:srgbClr val="14213D"/>
                 </a:solidFill>
               </a:rPr>
-              <a:t>13.47M</a:t>
+              <a:t>13.85M</a:t>
             </a:r>
             <a:endParaRPr lang="en-US" sz="2800" dirty="0"/>
           </a:p>
@@ -5771,7 +5771,7 @@
                   <a:srgbClr val="52607A"/>
                 </a:solidFill>
               </a:rPr>
-              <a:t>651,159 man-days · 20.7 pcs/man-day</a:t>
+              <a:t>666,178 man-days · 20.8 pcs/man-day</a:t>
             </a:r>
             <a:endParaRPr lang="en-US" sz="1050" dirty="0"/>
           </a:p>
@@ -6260,7 +6260,7 @@
                   <a:srgbClr val="14213D"/>
                 </a:solidFill>
               </a:rPr>
-              <a:t>Jan–May averaged $2,708 per line-day; Jun–Oct dropped to $2,401 (−$307).</a:t>
+              <a:t>Jan–May averaged $2,708 per line-day; Jun–Oct dropped to $2,421 (−$287).</a:t>
             </a:r>
             <a:endParaRPr lang="en-US" sz="1400" dirty="0"/>
           </a:p>
@@ -6278,7 +6278,7 @@
                   <a:srgbClr val="14213D"/>
                 </a:solidFill>
               </a:rPr>
-              <a:t>Efficiency is 10.7 points under standard — each point is worth about $326,806 of CM at today's mix.</a:t>
+              <a:t>Efficiency is 10.8 points under standard — each point is worth about $335,948 of CM at today's mix.</a:t>
             </a:r>
             <a:endParaRPr lang="en-US" sz="1400" dirty="0"/>
           </a:p>
@@ -6296,7 +6296,7 @@
                   <a:srgbClr val="14213D"/>
                 </a:solidFill>
               </a:rPr>
-              <a:t>ZARA + OJG = 58% of CM. Our accounts TARGET + KMART = $1.96M (8.7%).</a:t>
+              <a:t>ZARA + OJG = 58% of CM. Our accounts TARGET + KMART = $1.98M (8.5%).</a:t>
             </a:r>
             <a:endParaRPr lang="en-US" sz="1400" dirty="0"/>
           </a:p>
@@ -6438,7 +6438,7 @@
                   <a:srgbClr val="52607A"/>
                 </a:solidFill>
               </a:rPr>
-              <a:t>US$ earned from sewing · October is to 17 Oct only</a:t>
+              <a:t>US$ earned from sewing · October is to 24 Oct only</a:t>
             </a:r>
             <a:endParaRPr lang="en-US" sz="1300" dirty="0"/>
           </a:p>
@@ -6592,7 +6592,7 @@
                   <a:srgbClr val="14213D"/>
                 </a:solidFill>
               </a:rPr>
-              <a:t>Oct $1.27M covers 1–17 Oct only.</a:t>
+              <a:t>Oct $1.87M covers 1–24 Oct only.</a:t>
             </a:r>
             <a:endParaRPr lang="en-US" sz="1400" dirty="0"/>
           </a:p>
@@ -6852,7 +6852,7 @@
                   <a:srgbClr val="14213D"/>
                 </a:solidFill>
               </a:rPr>
-              <a:t>Below $2,500 in 5 month(s): Mar, Jul, Aug, Sept, Oct.</a:t>
+              <a:t>Below $2,500 in 4 month(s): Mar, Jul, Aug, Sept.</a:t>
             </a:r>
             <a:endParaRPr lang="en-US" sz="1400" dirty="0"/>
           </a:p>
@@ -6888,7 +6888,7 @@
                   <a:srgbClr val="14213D"/>
                 </a:solidFill>
               </a:rPr>
-              <a:t>Efficiency fell from 76.6% (Jan) to 64.2% (Oct) over the same period.</a:t>
+              <a:t>Efficiency fell from 76.6% (Jan) to 64.4% (Oct) over the same period.</a:t>
             </a:r>
             <a:endParaRPr lang="en-US" sz="1400" dirty="0"/>
           </a:p>
@@ -7130,7 +7130,7 @@
                   <a:srgbClr val="14213D"/>
                 </a:solidFill>
               </a:rPr>
-              <a:t>Total gap −$8.34M on 8,854 line-days.</a:t>
+              <a:t>Total gap −$8.48M on 9,066 line-days.</a:t>
             </a:r>
             <a:endParaRPr lang="en-US" sz="1400" dirty="0"/>
           </a:p>
@@ -7444,7 +7444,7 @@
                   <a:srgbClr val="14213D"/>
                 </a:solidFill>
               </a:rPr>
-              <a:t>Above $2,500/line-day (≥ 30 line-days): ZARA $2,905, GAP $3,121, EXPRESS $3,131, NOBLE OUTFITTERS $2,680, AERO $2,551, TRIBAL $2,571.</a:t>
+              <a:t>Above $2,500/line-day (≥ 30 line-days): ZARA $2,911, GAP $3,128, EXPRESS $3,130, NOBLE OUTFITTERS $2,690, AERO $2,580, TRIBAL $2,579.</a:t>
             </a:r>
             <a:endParaRPr lang="en-US" sz="1400" dirty="0"/>
           </a:p>
@@ -8405,7 +8405,7 @@
                           <a:ea typeface="Calibri" pitchFamily="34" charset="-122"/>
                           <a:cs typeface="Calibri" pitchFamily="34" charset="-120"/>
                         </a:rPr>
-                        <a:t>2,451</a:t>
+                        <a:t>2,476</a:t>
                       </a:r>
                       <a:endParaRPr lang="en-US" sz="1100" dirty="0">
                         <a:latin typeface="Calibri" charset="0"/>
@@ -8470,7 +8470,7 @@
                           <a:ea typeface="Calibri" pitchFamily="34" charset="-122"/>
                           <a:cs typeface="Calibri" pitchFamily="34" charset="-120"/>
                         </a:rPr>
-                        <a:t>7,120,480</a:t>
+                        <a:t>7,208,435</a:t>
                       </a:r>
                       <a:endParaRPr lang="en-US" sz="1100" dirty="0">
                         <a:latin typeface="Calibri" charset="0"/>
@@ -8535,7 +8535,7 @@
                           <a:ea typeface="Calibri" pitchFamily="34" charset="-122"/>
                           <a:cs typeface="Calibri" pitchFamily="34" charset="-120"/>
                         </a:rPr>
-                        <a:t>31.4%</a:t>
+                        <a:t>31.0%</a:t>
                       </a:r>
                       <a:endParaRPr lang="en-US" sz="1100" dirty="0">
                         <a:latin typeface="Calibri" charset="0"/>
@@ -8600,7 +8600,7 @@
                           <a:ea typeface="Calibri" pitchFamily="34" charset="-122"/>
                           <a:cs typeface="Calibri" pitchFamily="34" charset="-120"/>
                         </a:rPr>
-                        <a:t>2,905</a:t>
+                        <a:t>2,911</a:t>
                       </a:r>
                       <a:endParaRPr lang="en-US" sz="1100" dirty="0">
                         <a:latin typeface="Calibri" charset="0"/>
@@ -8665,7 +8665,7 @@
                           <a:ea typeface="Calibri" pitchFamily="34" charset="-122"/>
                           <a:cs typeface="Calibri" pitchFamily="34" charset="-120"/>
                         </a:rPr>
-                        <a:t>−$1,458,020</a:t>
+                        <a:t>−$1,457,565</a:t>
                       </a:r>
                       <a:endParaRPr lang="en-US" sz="1100" dirty="0">
                         <a:latin typeface="Calibri" charset="0"/>
@@ -8795,7 +8795,7 @@
                           <a:ea typeface="Calibri" pitchFamily="34" charset="-122"/>
                           <a:cs typeface="Calibri" pitchFamily="34" charset="-120"/>
                         </a:rPr>
-                        <a:t>0.0874</a:t>
+                        <a:t>0.0873</a:t>
                       </a:r>
                       <a:endParaRPr lang="en-US" sz="1100" dirty="0">
                         <a:latin typeface="Calibri" charset="0"/>
@@ -8992,7 +8992,7 @@
                           <a:ea typeface="Calibri" pitchFamily="34" charset="-122"/>
                           <a:cs typeface="Calibri" pitchFamily="34" charset="-120"/>
                         </a:rPr>
-                        <a:t>2,515</a:t>
+                        <a:t>2,591</a:t>
                       </a:r>
                       <a:endParaRPr lang="en-US" sz="1100" dirty="0">
                         <a:latin typeface="Calibri" charset="0"/>
@@ -9057,7 +9057,7 @@
                           <a:ea typeface="Calibri" pitchFamily="34" charset="-122"/>
                           <a:cs typeface="Calibri" pitchFamily="34" charset="-120"/>
                         </a:rPr>
-                        <a:t>6,082,387</a:t>
+                        <a:t>6,274,254</a:t>
                       </a:r>
                       <a:endParaRPr lang="en-US" sz="1100" dirty="0">
                         <a:latin typeface="Calibri" charset="0"/>
@@ -9122,7 +9122,7 @@
                           <a:ea typeface="Calibri" pitchFamily="34" charset="-122"/>
                           <a:cs typeface="Calibri" pitchFamily="34" charset="-120"/>
                         </a:rPr>
-                        <a:t>26.9%</a:t>
+                        <a:t>27.0%</a:t>
                       </a:r>
                       <a:endParaRPr lang="en-US" sz="1100" dirty="0">
                         <a:latin typeface="Calibri" charset="0"/>
@@ -9187,7 +9187,7 @@
                           <a:ea typeface="Calibri" pitchFamily="34" charset="-122"/>
                           <a:cs typeface="Calibri" pitchFamily="34" charset="-120"/>
                         </a:rPr>
-                        <a:t>2,418</a:t>
+                        <a:t>2,422</a:t>
                       </a:r>
                       <a:endParaRPr lang="en-US" sz="1100" dirty="0">
                         <a:latin typeface="Calibri" charset="0"/>
@@ -9252,7 +9252,7 @@
                           <a:ea typeface="Calibri" pitchFamily="34" charset="-122"/>
                           <a:cs typeface="Calibri" pitchFamily="34" charset="-120"/>
                         </a:rPr>
-                        <a:t>−$2,720,113</a:t>
+                        <a:t>−$2,794,246</a:t>
                       </a:r>
                       <a:endParaRPr lang="en-US" sz="1100" dirty="0">
                         <a:latin typeface="Calibri" charset="0"/>
@@ -9317,7 +9317,7 @@
                           <a:ea typeface="Calibri" pitchFamily="34" charset="-122"/>
                           <a:cs typeface="Calibri" pitchFamily="34" charset="-120"/>
                         </a:rPr>
-                        <a:t>69.9</a:t>
+                        <a:t>69.6</a:t>
                       </a:r>
                       <a:endParaRPr lang="en-US" sz="1100" dirty="0">
                         <a:latin typeface="Calibri" charset="0"/>
@@ -9579,7 +9579,7 @@
                           <a:ea typeface="Calibri" pitchFamily="34" charset="-122"/>
                           <a:cs typeface="Calibri" pitchFamily="34" charset="-120"/>
                         </a:rPr>
-                        <a:t>737</a:t>
+                        <a:t>768</a:t>
                       </a:r>
                       <a:endParaRPr lang="en-US" sz="1100" dirty="0">
                         <a:latin typeface="Calibri" charset="0"/>
@@ -9644,7 +9644,7 @@
                           <a:ea typeface="Calibri" pitchFamily="34" charset="-122"/>
                           <a:cs typeface="Calibri" pitchFamily="34" charset="-120"/>
                         </a:rPr>
-                        <a:t>2,300,232</a:t>
+                        <a:t>2,402,256</a:t>
                       </a:r>
                       <a:endParaRPr lang="en-US" sz="1100" dirty="0">
                         <a:latin typeface="Calibri" charset="0"/>
@@ -9709,7 +9709,7 @@
                           <a:ea typeface="Calibri" pitchFamily="34" charset="-122"/>
                           <a:cs typeface="Calibri" pitchFamily="34" charset="-120"/>
                         </a:rPr>
-                        <a:t>10.2%</a:t>
+                        <a:t>10.3%</a:t>
                       </a:r>
                       <a:endParaRPr lang="en-US" sz="1100" dirty="0">
                         <a:latin typeface="Calibri" charset="0"/>
@@ -9774,7 +9774,7 @@
                           <a:ea typeface="Calibri" pitchFamily="34" charset="-122"/>
                           <a:cs typeface="Calibri" pitchFamily="34" charset="-120"/>
                         </a:rPr>
-                        <a:t>3,121</a:t>
+                        <a:t>3,128</a:t>
                       </a:r>
                       <a:endParaRPr lang="en-US" sz="1100" dirty="0">
                         <a:latin typeface="Calibri" charset="0"/>
@@ -9839,7 +9839,7 @@
                           <a:ea typeface="Calibri" pitchFamily="34" charset="-122"/>
                           <a:cs typeface="Calibri" pitchFamily="34" charset="-120"/>
                         </a:rPr>
-                        <a:t>−$279,268</a:t>
+                        <a:t>−$285,744</a:t>
                       </a:r>
                       <a:endParaRPr lang="en-US" sz="1100" dirty="0">
                         <a:latin typeface="Calibri" charset="0"/>
@@ -9904,7 +9904,7 @@
                           <a:ea typeface="Calibri" pitchFamily="34" charset="-122"/>
                           <a:cs typeface="Calibri" pitchFamily="34" charset="-120"/>
                         </a:rPr>
-                        <a:t>74.5</a:t>
+                        <a:t>73.9</a:t>
                       </a:r>
                       <a:endParaRPr lang="en-US" sz="1100" dirty="0">
                         <a:latin typeface="Calibri" charset="0"/>
@@ -9969,7 +9969,7 @@
                           <a:ea typeface="Calibri" pitchFamily="34" charset="-122"/>
                           <a:cs typeface="Calibri" pitchFamily="34" charset="-120"/>
                         </a:rPr>
-                        <a:t>0.0986</a:t>
+                        <a:t>0.0990</a:t>
                       </a:r>
                       <a:endParaRPr lang="en-US" sz="1100" dirty="0">
                         <a:latin typeface="Calibri" charset="0"/>
@@ -10172,7 +10172,7 @@
                           <a:ea typeface="Calibri" pitchFamily="34" charset="-122"/>
                           <a:cs typeface="Calibri" pitchFamily="34" charset="-120"/>
                         </a:rPr>
-                        <a:t>596</a:t>
+                        <a:t>602</a:t>
                       </a:r>
                       <a:endParaRPr lang="en-US" sz="1100" dirty="0">
                         <a:latin typeface="Calibri" charset="0"/>
@@ -10240,7 +10240,7 @@
                           <a:ea typeface="Calibri" pitchFamily="34" charset="-122"/>
                           <a:cs typeface="Calibri" pitchFamily="34" charset="-120"/>
                         </a:rPr>
-                        <a:t>1,313,095</a:t>
+                        <a:t>1,323,568</a:t>
                       </a:r>
                       <a:endParaRPr lang="en-US" sz="1100" dirty="0">
                         <a:latin typeface="Calibri" charset="0"/>
@@ -10308,7 +10308,7 @@
                           <a:ea typeface="Calibri" pitchFamily="34" charset="-122"/>
                           <a:cs typeface="Calibri" pitchFamily="34" charset="-120"/>
                         </a:rPr>
-                        <a:t>5.8%</a:t>
+                        <a:t>5.7%</a:t>
                       </a:r>
                       <a:endParaRPr lang="en-US" sz="1100" dirty="0">
                         <a:latin typeface="Calibri" charset="0"/>
@@ -10376,7 +10376,7 @@
                           <a:ea typeface="Calibri" pitchFamily="34" charset="-122"/>
                           <a:cs typeface="Calibri" pitchFamily="34" charset="-120"/>
                         </a:rPr>
-                        <a:t>2,203</a:t>
+                        <a:t>2,199</a:t>
                       </a:r>
                       <a:endParaRPr lang="en-US" sz="1100" dirty="0">
                         <a:latin typeface="Calibri" charset="0"/>
@@ -10444,7 +10444,7 @@
                           <a:ea typeface="Calibri" pitchFamily="34" charset="-122"/>
                           <a:cs typeface="Calibri" pitchFamily="34" charset="-120"/>
                         </a:rPr>
-                        <a:t>−$772,905</a:t>
+                        <a:t>−$783,432</a:t>
                       </a:r>
                       <a:endParaRPr lang="en-US" sz="1100" dirty="0">
                         <a:latin typeface="Calibri" charset="0"/>
@@ -10512,7 +10512,7 @@
                           <a:ea typeface="Calibri" pitchFamily="34" charset="-122"/>
                           <a:cs typeface="Calibri" pitchFamily="34" charset="-120"/>
                         </a:rPr>
-                        <a:t>66.8</a:t>
+                        <a:t>66.6</a:t>
                       </a:r>
                       <a:endParaRPr lang="en-US" sz="1100" dirty="0">
                         <a:latin typeface="Calibri" charset="0"/>
@@ -10780,7 +10780,7 @@
                           <a:ea typeface="Calibri" pitchFamily="34" charset="-122"/>
                           <a:cs typeface="Calibri" pitchFamily="34" charset="-120"/>
                         </a:rPr>
-                        <a:t>258</a:t>
+                        <a:t>264</a:t>
                       </a:r>
                       <a:endParaRPr lang="en-US" sz="1100" dirty="0">
                         <a:latin typeface="Calibri" charset="0"/>
@@ -10845,7 +10845,7 @@
                           <a:ea typeface="Calibri" pitchFamily="34" charset="-122"/>
                           <a:cs typeface="Calibri" pitchFamily="34" charset="-120"/>
                         </a:rPr>
-                        <a:t>807,716</a:t>
+                        <a:t>826,218</a:t>
                       </a:r>
                       <a:endParaRPr lang="en-US" sz="1100" dirty="0">
                         <a:latin typeface="Calibri" charset="0"/>
@@ -10975,7 +10975,7 @@
                           <a:ea typeface="Calibri" pitchFamily="34" charset="-122"/>
                           <a:cs typeface="Calibri" pitchFamily="34" charset="-120"/>
                         </a:rPr>
-                        <a:t>3,131</a:t>
+                        <a:t>3,130</a:t>
                       </a:r>
                       <a:endParaRPr lang="en-US" sz="1100" dirty="0">
                         <a:latin typeface="Calibri" charset="0"/>
@@ -11040,7 +11040,7 @@
                           <a:ea typeface="Calibri" pitchFamily="34" charset="-122"/>
                           <a:cs typeface="Calibri" pitchFamily="34" charset="-120"/>
                         </a:rPr>
-                        <a:t>−$95,284</a:t>
+                        <a:t>−$97,782</a:t>
                       </a:r>
                       <a:endParaRPr lang="en-US" sz="1100" dirty="0">
                         <a:latin typeface="Calibri" charset="0"/>
@@ -11105,7 +11105,7 @@
                           <a:ea typeface="Calibri" pitchFamily="34" charset="-122"/>
                           <a:cs typeface="Calibri" pitchFamily="34" charset="-120"/>
                         </a:rPr>
-                        <a:t>64.8</a:t>
+                        <a:t>64.7</a:t>
                       </a:r>
                       <a:endParaRPr lang="en-US" sz="1100" dirty="0">
                         <a:latin typeface="Calibri" charset="0"/>
@@ -11170,7 +11170,7 @@
                           <a:ea typeface="Calibri" pitchFamily="34" charset="-122"/>
                           <a:cs typeface="Calibri" pitchFamily="34" charset="-120"/>
                         </a:rPr>
-                        <a:t>0.1159</a:t>
+                        <a:t>0.1157</a:t>
                       </a:r>
                       <a:endParaRPr lang="en-US" sz="1100" dirty="0">
                         <a:latin typeface="Calibri" charset="0"/>
@@ -11367,7 +11367,7 @@
                           <a:ea typeface="Calibri" pitchFamily="34" charset="-122"/>
                           <a:cs typeface="Calibri" pitchFamily="34" charset="-120"/>
                         </a:rPr>
-                        <a:t>354</a:t>
+                        <a:t>364</a:t>
                       </a:r>
                       <a:endParaRPr lang="en-US" sz="1100" dirty="0">
                         <a:latin typeface="Calibri" charset="0"/>
@@ -11432,7 +11432,7 @@
                           <a:ea typeface="Calibri" pitchFamily="34" charset="-122"/>
                           <a:cs typeface="Calibri" pitchFamily="34" charset="-120"/>
                         </a:rPr>
-                        <a:t>779,521</a:t>
+                        <a:t>812,356</a:t>
                       </a:r>
                       <a:endParaRPr lang="en-US" sz="1100" dirty="0">
                         <a:latin typeface="Calibri" charset="0"/>
@@ -11497,7 +11497,7 @@
                           <a:ea typeface="Calibri" pitchFamily="34" charset="-122"/>
                           <a:cs typeface="Calibri" pitchFamily="34" charset="-120"/>
                         </a:rPr>
-                        <a:t>3.4%</a:t>
+                        <a:t>3.5%</a:t>
                       </a:r>
                       <a:endParaRPr lang="en-US" sz="1100" dirty="0">
                         <a:latin typeface="Calibri" charset="0"/>
@@ -11562,7 +11562,7 @@
                           <a:ea typeface="Calibri" pitchFamily="34" charset="-122"/>
                           <a:cs typeface="Calibri" pitchFamily="34" charset="-120"/>
                         </a:rPr>
-                        <a:t>2,202</a:t>
+                        <a:t>2,232</a:t>
                       </a:r>
                       <a:endParaRPr lang="en-US" sz="1100" dirty="0">
                         <a:latin typeface="Calibri" charset="0"/>
@@ -11627,7 +11627,7 @@
                           <a:ea typeface="Calibri" pitchFamily="34" charset="-122"/>
                           <a:cs typeface="Calibri" pitchFamily="34" charset="-120"/>
                         </a:rPr>
-                        <a:t>−$459,479</a:t>
+                        <a:t>−$461,644</a:t>
                       </a:r>
                       <a:endParaRPr lang="en-US" sz="1100" dirty="0">
                         <a:latin typeface="Calibri" charset="0"/>
@@ -11692,7 +11692,7 @@
                           <a:ea typeface="Calibri" pitchFamily="34" charset="-122"/>
                           <a:cs typeface="Calibri" pitchFamily="34" charset="-120"/>
                         </a:rPr>
-                        <a:t>69.5</a:t>
+                        <a:t>70.3</a:t>
                       </a:r>
                       <a:endParaRPr lang="en-US" sz="1100" dirty="0">
                         <a:latin typeface="Calibri" charset="0"/>
@@ -11757,7 +11757,7 @@
                           <a:ea typeface="Calibri" pitchFamily="34" charset="-122"/>
                           <a:cs typeface="Calibri" pitchFamily="34" charset="-120"/>
                         </a:rPr>
-                        <a:t>0.0675</a:t>
+                        <a:t>0.0674</a:t>
                       </a:r>
                       <a:endParaRPr lang="en-US" sz="1100" dirty="0">
                         <a:latin typeface="Calibri" charset="0"/>
@@ -11954,7 +11954,7 @@
                           <a:ea typeface="Calibri" pitchFamily="34" charset="-122"/>
                           <a:cs typeface="Calibri" pitchFamily="34" charset="-120"/>
                         </a:rPr>
-                        <a:t>245</a:t>
+                        <a:t>252</a:t>
                       </a:r>
                       <a:endParaRPr lang="en-US" sz="1100" dirty="0">
                         <a:latin typeface="Calibri" charset="0"/>
@@ -12019,7 +12019,7 @@
                           <a:ea typeface="Calibri" pitchFamily="34" charset="-122"/>
                           <a:cs typeface="Calibri" pitchFamily="34" charset="-120"/>
                         </a:rPr>
-                        <a:t>656,632</a:t>
+                        <a:t>677,871</a:t>
                       </a:r>
                       <a:endParaRPr lang="en-US" sz="1100" dirty="0">
                         <a:latin typeface="Calibri" charset="0"/>
@@ -12149,7 +12149,7 @@
                           <a:ea typeface="Calibri" pitchFamily="34" charset="-122"/>
                           <a:cs typeface="Calibri" pitchFamily="34" charset="-120"/>
                         </a:rPr>
-                        <a:t>2,680</a:t>
+                        <a:t>2,690</a:t>
                       </a:r>
                       <a:endParaRPr lang="en-US" sz="1100" dirty="0">
                         <a:latin typeface="Calibri" charset="0"/>
@@ -12214,7 +12214,7 @@
                           <a:ea typeface="Calibri" pitchFamily="34" charset="-122"/>
                           <a:cs typeface="Calibri" pitchFamily="34" charset="-120"/>
                         </a:rPr>
-                        <a:t>−$200,868</a:t>
+                        <a:t>−$204,129</a:t>
                       </a:r>
                       <a:endParaRPr lang="en-US" sz="1100" dirty="0">
                         <a:latin typeface="Calibri" charset="0"/>
@@ -12279,7 +12279,7 @@
                           <a:ea typeface="Calibri" pitchFamily="34" charset="-122"/>
                           <a:cs typeface="Calibri" pitchFamily="34" charset="-120"/>
                         </a:rPr>
-                        <a:t>55.1</a:t>
+                        <a:t>55.0</a:t>
                       </a:r>
                       <a:endParaRPr lang="en-US" sz="1100" dirty="0">
                         <a:latin typeface="Calibri" charset="0"/>
@@ -12344,7 +12344,7 @@
                           <a:ea typeface="Calibri" pitchFamily="34" charset="-122"/>
                           <a:cs typeface="Calibri" pitchFamily="34" charset="-120"/>
                         </a:rPr>
-                        <a:t>0.1181</a:t>
+                        <a:t>0.1180</a:t>
                       </a:r>
                       <a:endParaRPr lang="en-US" sz="1100" dirty="0">
                         <a:latin typeface="Calibri" charset="0"/>
@@ -12547,7 +12547,7 @@
                           <a:ea typeface="Calibri" pitchFamily="34" charset="-122"/>
                           <a:cs typeface="Calibri" pitchFamily="34" charset="-120"/>
                         </a:rPr>
-                        <a:t>292</a:t>
+                        <a:t>297</a:t>
                       </a:r>
                       <a:endParaRPr lang="en-US" sz="1100" dirty="0">
                         <a:latin typeface="Calibri" charset="0"/>
@@ -12615,7 +12615,7 @@
                           <a:ea typeface="Calibri" pitchFamily="34" charset="-122"/>
                           <a:cs typeface="Calibri" pitchFamily="34" charset="-120"/>
                         </a:rPr>
-                        <a:t>646,838</a:t>
+                        <a:t>657,053</a:t>
                       </a:r>
                       <a:endParaRPr lang="en-US" sz="1100" dirty="0">
                         <a:latin typeface="Calibri" charset="0"/>
@@ -12683,7 +12683,7 @@
                           <a:ea typeface="Calibri" pitchFamily="34" charset="-122"/>
                           <a:cs typeface="Calibri" pitchFamily="34" charset="-120"/>
                         </a:rPr>
-                        <a:t>2.9%</a:t>
+                        <a:t>2.8%</a:t>
                       </a:r>
                       <a:endParaRPr lang="en-US" sz="1100" dirty="0">
                         <a:latin typeface="Calibri" charset="0"/>
@@ -12751,7 +12751,7 @@
                           <a:ea typeface="Calibri" pitchFamily="34" charset="-122"/>
                           <a:cs typeface="Calibri" pitchFamily="34" charset="-120"/>
                         </a:rPr>
-                        <a:t>2,215</a:t>
+                        <a:t>2,212</a:t>
                       </a:r>
                       <a:endParaRPr lang="en-US" sz="1100" dirty="0">
                         <a:latin typeface="Calibri" charset="0"/>
@@ -12819,7 +12819,7 @@
                           <a:ea typeface="Calibri" pitchFamily="34" charset="-122"/>
                           <a:cs typeface="Calibri" pitchFamily="34" charset="-120"/>
                         </a:rPr>
-                        <a:t>−$375,162</a:t>
+                        <a:t>−$382,447</a:t>
                       </a:r>
                       <a:endParaRPr lang="en-US" sz="1100" dirty="0">
                         <a:latin typeface="Calibri" charset="0"/>
@@ -12887,7 +12887,7 @@
                           <a:ea typeface="Calibri" pitchFamily="34" charset="-122"/>
                           <a:cs typeface="Calibri" pitchFamily="34" charset="-120"/>
                         </a:rPr>
-                        <a:t>68.8</a:t>
+                        <a:t>68.5</a:t>
                       </a:r>
                       <a:endParaRPr lang="en-US" sz="1100" dirty="0">
                         <a:latin typeface="Calibri" charset="0"/>
@@ -13155,7 +13155,7 @@
                           <a:ea typeface="Calibri" pitchFamily="34" charset="-122"/>
                           <a:cs typeface="Calibri" pitchFamily="34" charset="-120"/>
                         </a:rPr>
-                        <a:t>288</a:t>
+                        <a:t>292</a:t>
                       </a:r>
                       <a:endParaRPr lang="en-US" sz="1100" dirty="0">
                         <a:latin typeface="Calibri" charset="0"/>
@@ -13220,7 +13220,7 @@
                           <a:ea typeface="Calibri" pitchFamily="34" charset="-122"/>
                           <a:cs typeface="Calibri" pitchFamily="34" charset="-120"/>
                         </a:rPr>
-                        <a:t>611,579</a:t>
+                        <a:t>621,865</a:t>
                       </a:r>
                       <a:endParaRPr lang="en-US" sz="1100" dirty="0">
                         <a:latin typeface="Calibri" charset="0"/>
@@ -13350,7 +13350,7 @@
                           <a:ea typeface="Calibri" pitchFamily="34" charset="-122"/>
                           <a:cs typeface="Calibri" pitchFamily="34" charset="-120"/>
                         </a:rPr>
-                        <a:t>2,124</a:t>
+                        <a:t>2,130</a:t>
                       </a:r>
                       <a:endParaRPr lang="en-US" sz="1100" dirty="0">
                         <a:latin typeface="Calibri" charset="0"/>
@@ -13415,7 +13415,7 @@
                           <a:ea typeface="Calibri" pitchFamily="34" charset="-122"/>
                           <a:cs typeface="Calibri" pitchFamily="34" charset="-120"/>
                         </a:rPr>
-                        <a:t>−$396,421</a:t>
+                        <a:t>−$400,135</a:t>
                       </a:r>
                       <a:endParaRPr lang="en-US" sz="1100" dirty="0">
                         <a:latin typeface="Calibri" charset="0"/>
@@ -13545,7 +13545,7 @@
                           <a:ea typeface="Calibri" pitchFamily="34" charset="-122"/>
                           <a:cs typeface="Calibri" pitchFamily="34" charset="-120"/>
                         </a:rPr>
-                        <a:t>0.0811</a:t>
+                        <a:t>0.0812</a:t>
                       </a:r>
                       <a:endParaRPr lang="en-US" sz="1100" dirty="0">
                         <a:latin typeface="Calibri" charset="0"/>
@@ -14916,7 +14916,7 @@
                           <a:ea typeface="Calibri" pitchFamily="34" charset="-122"/>
                           <a:cs typeface="Calibri" pitchFamily="34" charset="-120"/>
                         </a:rPr>
-                        <a:t>140</a:t>
+                        <a:t>156</a:t>
                       </a:r>
                       <a:endParaRPr lang="en-US" sz="1100" dirty="0">
                         <a:latin typeface="Calibri" charset="0"/>
@@ -14981,7 +14981,7 @@
                           <a:ea typeface="Calibri" pitchFamily="34" charset="-122"/>
                           <a:cs typeface="Calibri" pitchFamily="34" charset="-120"/>
                         </a:rPr>
-                        <a:t>357,182</a:t>
+                        <a:t>402,485</a:t>
                       </a:r>
                       <a:endParaRPr lang="en-US" sz="1100" dirty="0">
                         <a:latin typeface="Calibri" charset="0"/>
@@ -15046,7 +15046,7 @@
                           <a:ea typeface="Calibri" pitchFamily="34" charset="-122"/>
                           <a:cs typeface="Calibri" pitchFamily="34" charset="-120"/>
                         </a:rPr>
-                        <a:t>1.6%</a:t>
+                        <a:t>1.7%</a:t>
                       </a:r>
                       <a:endParaRPr lang="en-US" sz="1100" dirty="0">
                         <a:latin typeface="Calibri" charset="0"/>
@@ -15111,7 +15111,7 @@
                           <a:ea typeface="Calibri" pitchFamily="34" charset="-122"/>
                           <a:cs typeface="Calibri" pitchFamily="34" charset="-120"/>
                         </a:rPr>
-                        <a:t>2,551</a:t>
+                        <a:t>2,580</a:t>
                       </a:r>
                       <a:endParaRPr lang="en-US" sz="1100" dirty="0">
                         <a:latin typeface="Calibri" charset="0"/>
@@ -15176,7 +15176,7 @@
                           <a:ea typeface="Calibri" pitchFamily="34" charset="-122"/>
                           <a:cs typeface="Calibri" pitchFamily="34" charset="-120"/>
                         </a:rPr>
-                        <a:t>−$132,818</a:t>
+                        <a:t>−$143,515</a:t>
                       </a:r>
                       <a:endParaRPr lang="en-US" sz="1100" dirty="0">
                         <a:latin typeface="Calibri" charset="0"/>
@@ -15241,7 +15241,7 @@
                           <a:ea typeface="Calibri" pitchFamily="34" charset="-122"/>
                           <a:cs typeface="Calibri" pitchFamily="34" charset="-120"/>
                         </a:rPr>
-                        <a:t>63.0</a:t>
+                        <a:t>64.2</a:t>
                       </a:r>
                       <a:endParaRPr lang="en-US" sz="1100" dirty="0">
                         <a:latin typeface="Calibri" charset="0"/>
@@ -15306,7 +15306,7 @@
                           <a:ea typeface="Calibri" pitchFamily="34" charset="-122"/>
                           <a:cs typeface="Calibri" pitchFamily="34" charset="-120"/>
                         </a:rPr>
-                        <a:t>0.0979</a:t>
+                        <a:t>0.0953</a:t>
                       </a:r>
                       <a:endParaRPr lang="en-US" sz="1100" dirty="0">
                         <a:latin typeface="Calibri" charset="0"/>
@@ -15633,7 +15633,7 @@
                           <a:ea typeface="Calibri" pitchFamily="34" charset="-122"/>
                           <a:cs typeface="Calibri" pitchFamily="34" charset="-120"/>
                         </a:rPr>
-                        <a:t>1.4%</a:t>
+                        <a:t>1.3%</a:t>
                       </a:r>
                       <a:endParaRPr lang="en-US" sz="1100" dirty="0">
                         <a:latin typeface="Calibri" charset="0"/>
@@ -16090,7 +16090,7 @@
                           <a:ea typeface="Calibri" pitchFamily="34" charset="-122"/>
                           <a:cs typeface="Calibri" pitchFamily="34" charset="-120"/>
                         </a:rPr>
-                        <a:t>107</a:t>
+                        <a:t>113</a:t>
                       </a:r>
                       <a:endParaRPr lang="en-US" sz="1100" dirty="0">
                         <a:latin typeface="Calibri" charset="0"/>
@@ -16155,7 +16155,7 @@
                           <a:ea typeface="Calibri" pitchFamily="34" charset="-122"/>
                           <a:cs typeface="Calibri" pitchFamily="34" charset="-120"/>
                         </a:rPr>
-                        <a:t>242,478</a:t>
+                        <a:t>258,144</a:t>
                       </a:r>
                       <a:endParaRPr lang="en-US" sz="1100" dirty="0">
                         <a:latin typeface="Calibri" charset="0"/>
@@ -16285,7 +16285,7 @@
                           <a:ea typeface="Calibri" pitchFamily="34" charset="-122"/>
                           <a:cs typeface="Calibri" pitchFamily="34" charset="-120"/>
                         </a:rPr>
-                        <a:t>2,266</a:t>
+                        <a:t>2,285</a:t>
                       </a:r>
                       <a:endParaRPr lang="en-US" sz="1100" dirty="0">
                         <a:latin typeface="Calibri" charset="0"/>
@@ -16350,7 +16350,7 @@
                           <a:ea typeface="Calibri" pitchFamily="34" charset="-122"/>
                           <a:cs typeface="Calibri" pitchFamily="34" charset="-120"/>
                         </a:rPr>
-                        <a:t>−$132,022</a:t>
+                        <a:t>−$137,356</a:t>
                       </a:r>
                       <a:endParaRPr lang="en-US" sz="1100" dirty="0">
                         <a:latin typeface="Calibri" charset="0"/>
@@ -16415,7 +16415,7 @@
                           <a:ea typeface="Calibri" pitchFamily="34" charset="-122"/>
                           <a:cs typeface="Calibri" pitchFamily="34" charset="-120"/>
                         </a:rPr>
-                        <a:t>68.0</a:t>
+                        <a:t>68.1</a:t>
                       </a:r>
                       <a:endParaRPr lang="en-US" sz="1100" dirty="0">
                         <a:latin typeface="Calibri" charset="0"/>
@@ -16480,7 +16480,7 @@
                           <a:ea typeface="Calibri" pitchFamily="34" charset="-122"/>
                           <a:cs typeface="Calibri" pitchFamily="34" charset="-120"/>
                         </a:rPr>
-                        <a:t>0.0722</a:t>
+                        <a:t>0.0721</a:t>
                       </a:r>
                       <a:endParaRPr lang="en-US" sz="1100" dirty="0">
                         <a:latin typeface="Calibri" charset="0"/>
@@ -16677,7 +16677,7 @@
                           <a:ea typeface="Calibri" pitchFamily="34" charset="-122"/>
                           <a:cs typeface="Calibri" pitchFamily="34" charset="-120"/>
                         </a:rPr>
-                        <a:t>113</a:t>
+                        <a:t>123</a:t>
                       </a:r>
                       <a:endParaRPr lang="en-US" sz="1100" dirty="0">
                         <a:latin typeface="Calibri" charset="0"/>
@@ -16742,7 +16742,7 @@
                           <a:ea typeface="Calibri" pitchFamily="34" charset="-122"/>
                           <a:cs typeface="Calibri" pitchFamily="34" charset="-120"/>
                         </a:rPr>
-                        <a:t>201,104</a:t>
+                        <a:t>218,520</a:t>
                       </a:r>
                       <a:endParaRPr lang="en-US" sz="1100" dirty="0">
                         <a:latin typeface="Calibri" charset="0"/>
@@ -16872,7 +16872,7 @@
                           <a:ea typeface="Calibri" pitchFamily="34" charset="-122"/>
                           <a:cs typeface="Calibri" pitchFamily="34" charset="-120"/>
                         </a:rPr>
-                        <a:t>1,780</a:t>
+                        <a:t>1,777</a:t>
                       </a:r>
                       <a:endParaRPr lang="en-US" sz="1100" dirty="0">
                         <a:latin typeface="Calibri" charset="0"/>
@@ -16937,7 +16937,7 @@
                           <a:ea typeface="Calibri" pitchFamily="34" charset="-122"/>
                           <a:cs typeface="Calibri" pitchFamily="34" charset="-120"/>
                         </a:rPr>
-                        <a:t>−$194,396</a:t>
+                        <a:t>−$211,980</a:t>
                       </a:r>
                       <a:endParaRPr lang="en-US" sz="1100" dirty="0">
                         <a:latin typeface="Calibri" charset="0"/>
@@ -17002,7 +17002,7 @@
                           <a:ea typeface="Calibri" pitchFamily="34" charset="-122"/>
                           <a:cs typeface="Calibri" pitchFamily="34" charset="-120"/>
                         </a:rPr>
-                        <a:t>51.4</a:t>
+                        <a:t>50.3</a:t>
                       </a:r>
                       <a:endParaRPr lang="en-US" sz="1100" dirty="0">
                         <a:latin typeface="Calibri" charset="0"/>
@@ -17067,7 +17067,7 @@
                           <a:ea typeface="Calibri" pitchFamily="34" charset="-122"/>
                           <a:cs typeface="Calibri" pitchFamily="34" charset="-120"/>
                         </a:rPr>
-                        <a:t>0.0772</a:t>
+                        <a:t>0.0780</a:t>
                       </a:r>
                       <a:endParaRPr lang="en-US" sz="1100" dirty="0">
                         <a:latin typeface="Calibri" charset="0"/>
@@ -17391,7 +17391,7 @@
                   <a:srgbClr val="14213D"/>
                 </a:solidFill>
               </a:rPr>
-              <a:t>$1.31M</a:t>
+              <a:t>$1.32M</a:t>
             </a:r>
             <a:endParaRPr lang="en-US" sz="2800" dirty="0"/>
           </a:p>
@@ -17427,7 +17427,7 @@
                   <a:srgbClr val="52607A"/>
                 </a:solidFill>
               </a:rPr>
-              <a:t>596 line-days · grade B · 5.8% of factory</a:t>
+              <a:t>602 line-days · grade B · 5.7% of factory</a:t>
             </a:r>
             <a:endParaRPr lang="en-US" sz="1050" dirty="0"/>
           </a:p>
@@ -17526,7 +17526,7 @@
                   <a:srgbClr val="14213D"/>
                 </a:solidFill>
               </a:rPr>
-              <a:t>$0.65M</a:t>
+              <a:t>$0.66M</a:t>
             </a:r>
             <a:endParaRPr lang="en-US" sz="2800" dirty="0"/>
           </a:p>
@@ -17562,7 +17562,7 @@
                   <a:srgbClr val="52607A"/>
                 </a:solidFill>
               </a:rPr>
-              <a:t>292 line-days · grade C · 2.9% of factory</a:t>
+              <a:t>297 line-days · grade C · 2.8% of factory</a:t>
             </a:r>
             <a:endParaRPr lang="en-US" sz="1050" dirty="0"/>
           </a:p>
@@ -17661,7 +17661,7 @@
                   <a:srgbClr val="FFFFFF"/>
                 </a:solidFill>
               </a:rPr>
-              <a:t>$22.65M</a:t>
+              <a:t>$23.25M</a:t>
             </a:r>
             <a:endParaRPr lang="en-US" sz="3400" dirty="0"/>
           </a:p>
@@ -17697,7 +17697,7 @@
                   <a:srgbClr val="C9D6F2"/>
                 </a:solidFill>
               </a:rPr>
-              <a:t>8,854 line-days</a:t>
+              <a:t>9,066 line-days</a:t>
             </a:r>
             <a:endParaRPr lang="en-US" sz="1050" dirty="0"/>
           </a:p>
@@ -18157,7 +18157,7 @@
                           <a:ea typeface="Calibri" pitchFamily="34" charset="-122"/>
                           <a:cs typeface="Calibri" pitchFamily="34" charset="-120"/>
                         </a:rPr>
-                        <a:t>$2,203</a:t>
+                        <a:t>$2,199</a:t>
                       </a:r>
                       <a:endParaRPr lang="en-US" sz="1300" dirty="0">
                         <a:latin typeface="Calibri" charset="0"/>
@@ -18222,7 +18222,7 @@
                           <a:ea typeface="Calibri" pitchFamily="34" charset="-122"/>
                           <a:cs typeface="Calibri" pitchFamily="34" charset="-120"/>
                         </a:rPr>
-                        <a:t>$2,215</a:t>
+                        <a:t>$2,212</a:t>
                       </a:r>
                       <a:endParaRPr lang="en-US" sz="1300" dirty="0">
                         <a:latin typeface="Calibri" charset="0"/>
@@ -18287,7 +18287,7 @@
                           <a:ea typeface="Calibri" pitchFamily="34" charset="-122"/>
                           <a:cs typeface="Calibri" pitchFamily="34" charset="-120"/>
                         </a:rPr>
-                        <a:t>$2,558</a:t>
+                        <a:t>$2,564</a:t>
                       </a:r>
                       <a:endParaRPr lang="en-US" sz="1300" dirty="0">
                         <a:latin typeface="Calibri" charset="0"/>
@@ -18484,7 +18484,7 @@
                           <a:ea typeface="Calibri" pitchFamily="34" charset="-122"/>
                           <a:cs typeface="Calibri" pitchFamily="34" charset="-120"/>
                         </a:rPr>
-                        <a:t>66.8%</a:t>
+                        <a:t>66.6%</a:t>
                       </a:r>
                       <a:endParaRPr lang="en-US" sz="1300" dirty="0">
                         <a:latin typeface="Calibri" charset="0"/>
@@ -18549,7 +18549,7 @@
                           <a:ea typeface="Calibri" pitchFamily="34" charset="-122"/>
                           <a:cs typeface="Calibri" pitchFamily="34" charset="-120"/>
                         </a:rPr>
-                        <a:t>68.8%</a:t>
+                        <a:t>68.5%</a:t>
                       </a:r>
                       <a:endParaRPr lang="en-US" sz="1300" dirty="0">
                         <a:latin typeface="Calibri" charset="0"/>
@@ -18614,7 +18614,7 @@
                           <a:ea typeface="Calibri" pitchFamily="34" charset="-122"/>
                           <a:cs typeface="Calibri" pitchFamily="34" charset="-120"/>
                         </a:rPr>
-                        <a:t>69.3%</a:t>
+                        <a:t>69.2%</a:t>
                       </a:r>
                       <a:endParaRPr lang="en-US" sz="1300" dirty="0">
                         <a:latin typeface="Calibri" charset="0"/>
@@ -19203,7 +19203,7 @@
                           <a:ea typeface="Calibri" pitchFamily="34" charset="-122"/>
                           <a:cs typeface="Calibri" pitchFamily="34" charset="-120"/>
                         </a:rPr>
-                        <a:t>12.7%</a:t>
+                        <a:t>12.8%</a:t>
                       </a:r>
                       <a:endParaRPr lang="en-US" sz="1300" dirty="0">
                         <a:latin typeface="Calibri" charset="0"/>
@@ -19465,7 +19465,7 @@
                           <a:ea typeface="Calibri" pitchFamily="34" charset="-122"/>
                           <a:cs typeface="Calibri" pitchFamily="34" charset="-120"/>
                         </a:rPr>
-                        <a:t>−$772,905</a:t>
+                        <a:t>−$783,432</a:t>
                       </a:r>
                       <a:endParaRPr lang="en-US" sz="1300" dirty="0">
                         <a:latin typeface="Calibri" charset="0"/>
@@ -19530,7 +19530,7 @@
                           <a:ea typeface="Calibri" pitchFamily="34" charset="-122"/>
                           <a:cs typeface="Calibri" pitchFamily="34" charset="-120"/>
                         </a:rPr>
-                        <a:t>−$375,162</a:t>
+                        <a:t>−$382,447</a:t>
                       </a:r>
                       <a:endParaRPr lang="en-US" sz="1300" dirty="0">
                         <a:latin typeface="Calibri" charset="0"/>
@@ -19595,7 +19595,7 @@
                           <a:ea typeface="Calibri" pitchFamily="34" charset="-122"/>
                           <a:cs typeface="Calibri" pitchFamily="34" charset="-120"/>
                         </a:rPr>
-                        <a:t>−$8,341,332</a:t>
+                        <a:t>−$8,483,418</a:t>
                       </a:r>
                       <a:endParaRPr lang="en-US" sz="1300" dirty="0">
                         <a:latin typeface="Calibri" charset="0"/>
@@ -19743,7 +19743,7 @@
                   <a:srgbClr val="14213D"/>
                 </a:solidFill>
               </a:rPr>
-              <a:t>At factory efficiency (69.3%), TARGET would earn about $49,143 more and KMART about $4,701 more over the same line-days (simple pro-rata, same CM per minute).</a:t>
+              <a:t>At factory efficiency (69.2%), TARGET would earn about $51,671 more and KMART about $6,714 more over the same line-days (simple pro-rata, same CM per minute).</a:t>
             </a:r>
             <a:endParaRPr lang="en-US" sz="1200" dirty="0"/>
           </a:p>
@@ -20580,7 +20580,7 @@
                           <a:ea typeface="Calibri" pitchFamily="34" charset="-122"/>
                           <a:cs typeface="Calibri" pitchFamily="34" charset="-120"/>
                         </a:rPr>
-                        <a:t>3,728</a:t>
+                        <a:t>3,824</a:t>
                       </a:r>
                       <a:endParaRPr lang="en-US" sz="1200" dirty="0">
                         <a:latin typeface="Calibri" charset="0"/>
@@ -20645,7 +20645,7 @@
                           <a:ea typeface="Calibri" pitchFamily="34" charset="-122"/>
                           <a:cs typeface="Calibri" pitchFamily="34" charset="-120"/>
                         </a:rPr>
-                        <a:t>9,852,006</a:t>
+                        <a:t>10,123,323</a:t>
                       </a:r>
                       <a:endParaRPr lang="en-US" sz="1200" dirty="0">
                         <a:latin typeface="Calibri" charset="0"/>
@@ -20710,7 +20710,7 @@
                           <a:ea typeface="Calibri" pitchFamily="34" charset="-122"/>
                           <a:cs typeface="Calibri" pitchFamily="34" charset="-120"/>
                         </a:rPr>
-                        <a:t>2,643</a:t>
+                        <a:t>2,647</a:t>
                       </a:r>
                       <a:endParaRPr lang="en-US" sz="1200" dirty="0">
                         <a:latin typeface="Calibri" charset="0"/>
@@ -20840,7 +20840,7 @@
                           <a:ea typeface="Calibri" pitchFamily="34" charset="-122"/>
                           <a:cs typeface="Calibri" pitchFamily="34" charset="-120"/>
                         </a:rPr>
-                        <a:t>−$3,195,994</a:t>
+                        <a:t>−$3,260,677</a:t>
                       </a:r>
                       <a:endParaRPr lang="en-US" sz="1200" dirty="0">
                         <a:latin typeface="Calibri" charset="0"/>
@@ -21037,7 +21037,7 @@
                           <a:ea typeface="Calibri" pitchFamily="34" charset="-122"/>
                           <a:cs typeface="Calibri" pitchFamily="34" charset="-120"/>
                         </a:rPr>
-                        <a:t>3,728</a:t>
+                        <a:t>3,808</a:t>
                       </a:r>
                       <a:endParaRPr lang="en-US" sz="1200" dirty="0">
                         <a:latin typeface="Calibri" charset="0"/>
@@ -21102,7 +21102,7 @@
                           <a:ea typeface="Calibri" pitchFamily="34" charset="-122"/>
                           <a:cs typeface="Calibri" pitchFamily="34" charset="-120"/>
                         </a:rPr>
-                        <a:t>9,273,113</a:t>
+                        <a:t>9,498,753</a:t>
                       </a:r>
                       <a:endParaRPr lang="en-US" sz="1200" dirty="0">
                         <a:latin typeface="Calibri" charset="0"/>
@@ -21167,7 +21167,7 @@
                           <a:ea typeface="Calibri" pitchFamily="34" charset="-122"/>
                           <a:cs typeface="Calibri" pitchFamily="34" charset="-120"/>
                         </a:rPr>
-                        <a:t>2,487</a:t>
+                        <a:t>2,494</a:t>
                       </a:r>
                       <a:endParaRPr lang="en-US" sz="1200" dirty="0">
                         <a:latin typeface="Calibri" charset="0"/>
@@ -21232,7 +21232,7 @@
                           <a:ea typeface="Calibri" pitchFamily="34" charset="-122"/>
                           <a:cs typeface="Calibri" pitchFamily="34" charset="-120"/>
                         </a:rPr>
-                        <a:t>7 of 16</a:t>
+                        <a:t>8 of 16</a:t>
                       </a:r>
                       <a:endParaRPr lang="en-US" sz="1200" dirty="0">
                         <a:latin typeface="Calibri" charset="0"/>
@@ -21297,7 +21297,7 @@
                           <a:ea typeface="Calibri" pitchFamily="34" charset="-122"/>
                           <a:cs typeface="Calibri" pitchFamily="34" charset="-120"/>
                         </a:rPr>
-                        <a:t>−$3,774,887</a:t>
+                        <a:t>−$3,829,247</a:t>
                       </a:r>
                       <a:endParaRPr lang="en-US" sz="1200" dirty="0">
                         <a:latin typeface="Calibri" charset="0"/>
@@ -21494,7 +21494,7 @@
                           <a:ea typeface="Calibri" pitchFamily="34" charset="-122"/>
                           <a:cs typeface="Calibri" pitchFamily="34" charset="-120"/>
                         </a:rPr>
-                        <a:t>1,398</a:t>
+                        <a:t>1,434</a:t>
                       </a:r>
                       <a:endParaRPr lang="en-US" sz="1200" dirty="0">
                         <a:latin typeface="Calibri" charset="0"/>
@@ -21559,7 +21559,7 @@
                           <a:ea typeface="Calibri" pitchFamily="34" charset="-122"/>
                           <a:cs typeface="Calibri" pitchFamily="34" charset="-120"/>
                         </a:rPr>
-                        <a:t>3,522,549</a:t>
+                        <a:t>3,625,506</a:t>
                       </a:r>
                       <a:endParaRPr lang="en-US" sz="1200" dirty="0">
                         <a:latin typeface="Calibri" charset="0"/>
@@ -21624,7 +21624,7 @@
                           <a:ea typeface="Calibri" pitchFamily="34" charset="-122"/>
                           <a:cs typeface="Calibri" pitchFamily="34" charset="-120"/>
                         </a:rPr>
-                        <a:t>2,520</a:t>
+                        <a:t>2,528</a:t>
                       </a:r>
                       <a:endParaRPr lang="en-US" sz="1200" dirty="0">
                         <a:latin typeface="Calibri" charset="0"/>
@@ -21689,7 +21689,7 @@
                           <a:ea typeface="Calibri" pitchFamily="34" charset="-122"/>
                           <a:cs typeface="Calibri" pitchFamily="34" charset="-120"/>
                         </a:rPr>
-                        <a:t>5 of 6</a:t>
+                        <a:t>4 of 6</a:t>
                       </a:r>
                       <a:endParaRPr lang="en-US" sz="1200" dirty="0">
                         <a:latin typeface="Calibri" charset="0"/>
@@ -21754,7 +21754,7 @@
                           <a:ea typeface="Calibri" pitchFamily="34" charset="-122"/>
                           <a:cs typeface="Calibri" pitchFamily="34" charset="-120"/>
                         </a:rPr>
-                        <a:t>−$1,370,451</a:t>
+                        <a:t>−$1,393,494</a:t>
                       </a:r>
                       <a:endParaRPr lang="en-US" sz="1200" dirty="0">
                         <a:latin typeface="Calibri" charset="0"/>
